--- a/dist/초2/기술·가정/자립과나눔/초2_기술·가정_자립과나눔_01_시간관리와집안일나누기_학생용.pptx
+++ b/dist/초2/기술·가정/자립과나눔/초2_기술·가정_자립과나눔_01_시간관리와집안일나누기_학생용.pptx
@@ -114,34 +114,34 @@
   <p:extLst>
     <p:ext uri="{521415D9-36F7-43E2-AB2F-B90AF26B5E84}">
       <p14:sectionLst xmlns:p14="http://schemas.microsoft.com/office/powerpoint/2010/main">
-        <p14:section name="도입" id="{34baebb7-4ac8-6bf5-bec8-7b4a8bbf8e44}">
+        <p14:section name="도입" id="{7088ffbd-a700-bbb4-4333-56fe066f00b7}">
           <p14:sldIdLst>
             <p14:sldId id="256"/>
             <p14:sldId id="257"/>
           </p14:sldIdLst>
         </p14:section>
-        <p14:section name="개념" id="{ee7e1e7b-993f-21d5-ebd1-a44de5b47524}">
+        <p14:section name="개념" id="{eaea78b8-2f7c-53aa-f39d-2976f453333f}">
           <p14:sldIdLst>
             <p14:sldId id="258"/>
           </p14:sldIdLst>
         </p14:section>
-        <p14:section name="연습" id="{f4a7f7c1-86db-6bc9-b8ee-890bd9455f03}">
+        <p14:section name="연습" id="{7108bf53-ef64-1ab8-7b7b-418e939c8be5}">
           <p14:sldIdLst>
             <p14:sldId id="259"/>
             <p14:sldId id="260"/>
           </p14:sldIdLst>
         </p14:section>
-        <p14:section name="확인" id="{708b744e-971c-b336-37c7-cae3120a3a25}">
+        <p14:section name="확인" id="{fa2bfae5-4411-b36e-a083-6a3ad97196e3}">
           <p14:sldIdLst>
             <p14:sldId id="261"/>
           </p14:sldIdLst>
         </p14:section>
-        <p14:section name="정리" id="{53e89d9d-50af-a76a-52dd-856793dd2816}">
+        <p14:section name="정리" id="{30524f2f-5275-2d58-cba2-60ae39b1eed2}">
           <p14:sldIdLst>
             <p14:sldId id="262"/>
           </p14:sldIdLst>
         </p14:section>
-        <p14:section name="보충" id="{d4ceff5d-207c-6b64-63d9-e041d6608122}">
+        <p14:section name="보충" id="{58f49625-2f7d-8f76-0199-bb805e559994}">
           <p14:sldIdLst>
             <p14:sldId id="263"/>
           </p14:sldIdLst>

--- a/dist/초2/기술·가정/자립과나눔/초2_기술·가정_자립과나눔_01_시간관리와집안일나누기_학생용.pptx
+++ b/dist/초2/기술·가정/자립과나눔/초2_기술·가정_자립과나눔_01_시간관리와집안일나누기_학생용.pptx
@@ -114,34 +114,34 @@
   <p:extLst>
     <p:ext uri="{521415D9-36F7-43E2-AB2F-B90AF26B5E84}">
       <p14:sectionLst xmlns:p14="http://schemas.microsoft.com/office/powerpoint/2010/main">
-        <p14:section name="도입" id="{7088ffbd-a700-bbb4-4333-56fe066f00b7}">
+        <p14:section name="도입" id="{cb5e4dab-3385-192f-15ad-9357f4f1260c}">
           <p14:sldIdLst>
             <p14:sldId id="256"/>
             <p14:sldId id="257"/>
           </p14:sldIdLst>
         </p14:section>
-        <p14:section name="개념" id="{eaea78b8-2f7c-53aa-f39d-2976f453333f}">
+        <p14:section name="개념" id="{fc066bf7-58d7-3936-4210-261c134dbb48}">
           <p14:sldIdLst>
             <p14:sldId id="258"/>
           </p14:sldIdLst>
         </p14:section>
-        <p14:section name="연습" id="{7108bf53-ef64-1ab8-7b7b-418e939c8be5}">
+        <p14:section name="연습" id="{5be91c35-3560-c6cf-2bc4-24b1b46f7ed9}">
           <p14:sldIdLst>
             <p14:sldId id="259"/>
             <p14:sldId id="260"/>
           </p14:sldIdLst>
         </p14:section>
-        <p14:section name="확인" id="{fa2bfae5-4411-b36e-a083-6a3ad97196e3}">
+        <p14:section name="확인" id="{1e792985-8801-5009-af5d-3d87194a0ea4}">
           <p14:sldIdLst>
             <p14:sldId id="261"/>
           </p14:sldIdLst>
         </p14:section>
-        <p14:section name="정리" id="{30524f2f-5275-2d58-cba2-60ae39b1eed2}">
+        <p14:section name="정리" id="{97d15b67-d8ea-6aa3-bfad-c474a6b4d250}">
           <p14:sldIdLst>
             <p14:sldId id="262"/>
           </p14:sldIdLst>
         </p14:section>
-        <p14:section name="보충" id="{58f49625-2f7d-8f76-0199-bb805e559994}">
+        <p14:section name="보충" id="{349094bd-26be-f5e7-82da-77856256f775}">
           <p14:sldIdLst>
             <p14:sldId id="263"/>
           </p14:sldIdLst>
